--- a/Identiter numerique et e-reputation/identite_numerique_ereputation.pptx
+++ b/Identiter numerique et e-reputation/identite_numerique_ereputation.pptx
@@ -1702,6 +1702,46 @@
           </a:prstGeom>
         </p:spPr>
       </p:pic>
+      <p:sp>
+        <p:nvSpPr>
+          <p:cNvPr id="11" name="ZoneTexte 10">
+            <a:extLst>
+              <a:ext uri="{FF2B5EF4-FFF2-40B4-BE49-F238E27FC236}">
+                <a16:creationId xmlns:a16="http://schemas.microsoft.com/office/drawing/2014/main" id="{1A5C08DB-9C45-F952-B225-A8E740916CF7}"/>
+              </a:ext>
+            </a:extLst>
+          </p:cNvPr>
+          <p:cNvSpPr txBox="1"/>
+          <p:nvPr/>
+        </p:nvSpPr>
+        <p:spPr>
+          <a:xfrm>
+            <a:off x="0" y="4864100"/>
+            <a:ext cx="9144000" cy="230832"/>
+          </a:xfrm>
+          <a:prstGeom prst="rect">
+            <a:avLst/>
+          </a:prstGeom>
+          <a:noFill/>
+        </p:spPr>
+        <p:txBody>
+          <a:bodyPr vert="horz" rtlCol="0">
+            <a:spAutoFit/>
+          </a:bodyPr>
+          <a:lstStyle/>
+          <a:p>
+            <a:pPr algn="ctr"/>
+            <a:r>
+              <a:rPr lang="fr-FR" sz="900">
+                <a:solidFill>
+                  <a:srgbClr val="B4B4B4"/>
+                </a:solidFill>
+              </a:rPr>
+              <a:t>(c) titi_23 - mediateur-numerique.github.io - Reproduction interdite sans autorisation</a:t>
+            </a:r>
+          </a:p>
+        </p:txBody>
+      </p:sp>
     </p:spTree>
   </p:cSld>
   <p:clrMapOvr>
@@ -2671,6 +2711,46 @@
           </a:p>
         </p:txBody>
       </p:sp>
+      <p:sp>
+        <p:nvSpPr>
+          <p:cNvPr id="28" name="ZoneTexte 27">
+            <a:extLst>
+              <a:ext uri="{FF2B5EF4-FFF2-40B4-BE49-F238E27FC236}">
+                <a16:creationId xmlns:a16="http://schemas.microsoft.com/office/drawing/2014/main" id="{57237641-305A-BF24-3A25-27B39E80FCA4}"/>
+              </a:ext>
+            </a:extLst>
+          </p:cNvPr>
+          <p:cNvSpPr txBox="1"/>
+          <p:nvPr/>
+        </p:nvSpPr>
+        <p:spPr>
+          <a:xfrm>
+            <a:off x="0" y="4864100"/>
+            <a:ext cx="9144000" cy="230832"/>
+          </a:xfrm>
+          <a:prstGeom prst="rect">
+            <a:avLst/>
+          </a:prstGeom>
+          <a:noFill/>
+        </p:spPr>
+        <p:txBody>
+          <a:bodyPr vert="horz" rtlCol="0">
+            <a:spAutoFit/>
+          </a:bodyPr>
+          <a:lstStyle/>
+          <a:p>
+            <a:pPr algn="ctr"/>
+            <a:r>
+              <a:rPr lang="fr-FR" sz="900">
+                <a:solidFill>
+                  <a:srgbClr val="B4B4B4"/>
+                </a:solidFill>
+              </a:rPr>
+              <a:t>(c) titi_23 - mediateur-numerique.github.io - Reproduction interdite sans autorisation</a:t>
+            </a:r>
+          </a:p>
+        </p:txBody>
+      </p:sp>
     </p:spTree>
   </p:cSld>
   <p:clrMapOvr>
@@ -3659,6 +3739,46 @@
           </a:p>
         </p:txBody>
       </p:sp>
+      <p:sp>
+        <p:nvSpPr>
+          <p:cNvPr id="28" name="ZoneTexte 27">
+            <a:extLst>
+              <a:ext uri="{FF2B5EF4-FFF2-40B4-BE49-F238E27FC236}">
+                <a16:creationId xmlns:a16="http://schemas.microsoft.com/office/drawing/2014/main" id="{0B747F81-AE57-5749-CAD7-FEF4E20385B6}"/>
+              </a:ext>
+            </a:extLst>
+          </p:cNvPr>
+          <p:cNvSpPr txBox="1"/>
+          <p:nvPr/>
+        </p:nvSpPr>
+        <p:spPr>
+          <a:xfrm>
+            <a:off x="0" y="4864100"/>
+            <a:ext cx="9144000" cy="230832"/>
+          </a:xfrm>
+          <a:prstGeom prst="rect">
+            <a:avLst/>
+          </a:prstGeom>
+          <a:noFill/>
+        </p:spPr>
+        <p:txBody>
+          <a:bodyPr vert="horz" rtlCol="0">
+            <a:spAutoFit/>
+          </a:bodyPr>
+          <a:lstStyle/>
+          <a:p>
+            <a:pPr algn="ctr"/>
+            <a:r>
+              <a:rPr lang="fr-FR" sz="900">
+                <a:solidFill>
+                  <a:srgbClr val="B4B4B4"/>
+                </a:solidFill>
+              </a:rPr>
+              <a:t>(c) titi_23 - mediateur-numerique.github.io - Reproduction interdite sans autorisation</a:t>
+            </a:r>
+          </a:p>
+        </p:txBody>
+      </p:sp>
     </p:spTree>
   </p:cSld>
   <p:clrMapOvr>
@@ -4722,6 +4842,46 @@
           </a:p>
         </p:txBody>
       </p:sp>
+      <p:sp>
+        <p:nvSpPr>
+          <p:cNvPr id="32" name="ZoneTexte 31">
+            <a:extLst>
+              <a:ext uri="{FF2B5EF4-FFF2-40B4-BE49-F238E27FC236}">
+                <a16:creationId xmlns:a16="http://schemas.microsoft.com/office/drawing/2014/main" id="{15A22161-C540-8DA2-A69F-BA14296BA274}"/>
+              </a:ext>
+            </a:extLst>
+          </p:cNvPr>
+          <p:cNvSpPr txBox="1"/>
+          <p:nvPr/>
+        </p:nvSpPr>
+        <p:spPr>
+          <a:xfrm>
+            <a:off x="0" y="4864100"/>
+            <a:ext cx="9144000" cy="230832"/>
+          </a:xfrm>
+          <a:prstGeom prst="rect">
+            <a:avLst/>
+          </a:prstGeom>
+          <a:noFill/>
+        </p:spPr>
+        <p:txBody>
+          <a:bodyPr vert="horz" rtlCol="0">
+            <a:spAutoFit/>
+          </a:bodyPr>
+          <a:lstStyle/>
+          <a:p>
+            <a:pPr algn="ctr"/>
+            <a:r>
+              <a:rPr lang="fr-FR" sz="900">
+                <a:solidFill>
+                  <a:srgbClr val="B4B4B4"/>
+                </a:solidFill>
+              </a:rPr>
+              <a:t>(c) titi_23 - mediateur-numerique.github.io - Reproduction interdite sans autorisation</a:t>
+            </a:r>
+          </a:p>
+        </p:txBody>
+      </p:sp>
     </p:spTree>
   </p:cSld>
   <p:clrMapOvr>
@@ -5581,6 +5741,46 @@
           </a:p>
         </p:txBody>
       </p:sp>
+      <p:sp>
+        <p:nvSpPr>
+          <p:cNvPr id="26" name="ZoneTexte 25">
+            <a:extLst>
+              <a:ext uri="{FF2B5EF4-FFF2-40B4-BE49-F238E27FC236}">
+                <a16:creationId xmlns:a16="http://schemas.microsoft.com/office/drawing/2014/main" id="{93019386-F5B7-F972-6011-9FC448763B91}"/>
+              </a:ext>
+            </a:extLst>
+          </p:cNvPr>
+          <p:cNvSpPr txBox="1"/>
+          <p:nvPr/>
+        </p:nvSpPr>
+        <p:spPr>
+          <a:xfrm>
+            <a:off x="0" y="4864100"/>
+            <a:ext cx="9144000" cy="230832"/>
+          </a:xfrm>
+          <a:prstGeom prst="rect">
+            <a:avLst/>
+          </a:prstGeom>
+          <a:noFill/>
+        </p:spPr>
+        <p:txBody>
+          <a:bodyPr vert="horz" rtlCol="0">
+            <a:spAutoFit/>
+          </a:bodyPr>
+          <a:lstStyle/>
+          <a:p>
+            <a:pPr algn="ctr"/>
+            <a:r>
+              <a:rPr lang="fr-FR" sz="900">
+                <a:solidFill>
+                  <a:srgbClr val="B4B4B4"/>
+                </a:solidFill>
+              </a:rPr>
+              <a:t>(c) titi_23 - mediateur-numerique.github.io - Reproduction interdite sans autorisation</a:t>
+            </a:r>
+          </a:p>
+        </p:txBody>
+      </p:sp>
     </p:spTree>
   </p:cSld>
   <p:clrMapOvr>
@@ -6448,6 +6648,46 @@
           </a:p>
         </p:txBody>
       </p:sp>
+      <p:sp>
+        <p:nvSpPr>
+          <p:cNvPr id="25" name="ZoneTexte 24">
+            <a:extLst>
+              <a:ext uri="{FF2B5EF4-FFF2-40B4-BE49-F238E27FC236}">
+                <a16:creationId xmlns:a16="http://schemas.microsoft.com/office/drawing/2014/main" id="{91145016-BF5F-635B-DD90-0DDC5DFA38E0}"/>
+              </a:ext>
+            </a:extLst>
+          </p:cNvPr>
+          <p:cNvSpPr txBox="1"/>
+          <p:nvPr/>
+        </p:nvSpPr>
+        <p:spPr>
+          <a:xfrm>
+            <a:off x="0" y="4864100"/>
+            <a:ext cx="9144000" cy="230832"/>
+          </a:xfrm>
+          <a:prstGeom prst="rect">
+            <a:avLst/>
+          </a:prstGeom>
+          <a:noFill/>
+        </p:spPr>
+        <p:txBody>
+          <a:bodyPr vert="horz" rtlCol="0">
+            <a:spAutoFit/>
+          </a:bodyPr>
+          <a:lstStyle/>
+          <a:p>
+            <a:pPr algn="ctr"/>
+            <a:r>
+              <a:rPr lang="fr-FR" sz="900">
+                <a:solidFill>
+                  <a:srgbClr val="B4B4B4"/>
+                </a:solidFill>
+              </a:rPr>
+              <a:t>(c) titi_23 - mediateur-numerique.github.io - Reproduction interdite sans autorisation</a:t>
+            </a:r>
+          </a:p>
+        </p:txBody>
+      </p:sp>
     </p:spTree>
   </p:cSld>
   <p:clrMapOvr>
@@ -7429,6 +7669,46 @@
           </a:p>
         </p:txBody>
       </p:sp>
+      <p:sp>
+        <p:nvSpPr>
+          <p:cNvPr id="28" name="ZoneTexte 27">
+            <a:extLst>
+              <a:ext uri="{FF2B5EF4-FFF2-40B4-BE49-F238E27FC236}">
+                <a16:creationId xmlns:a16="http://schemas.microsoft.com/office/drawing/2014/main" id="{68E4F859-3DE1-611C-478E-8A368620914F}"/>
+              </a:ext>
+            </a:extLst>
+          </p:cNvPr>
+          <p:cNvSpPr txBox="1"/>
+          <p:nvPr/>
+        </p:nvSpPr>
+        <p:spPr>
+          <a:xfrm>
+            <a:off x="0" y="4864100"/>
+            <a:ext cx="9144000" cy="230832"/>
+          </a:xfrm>
+          <a:prstGeom prst="rect">
+            <a:avLst/>
+          </a:prstGeom>
+          <a:noFill/>
+        </p:spPr>
+        <p:txBody>
+          <a:bodyPr vert="horz" rtlCol="0">
+            <a:spAutoFit/>
+          </a:bodyPr>
+          <a:lstStyle/>
+          <a:p>
+            <a:pPr algn="ctr"/>
+            <a:r>
+              <a:rPr lang="fr-FR" sz="900">
+                <a:solidFill>
+                  <a:srgbClr val="B4B4B4"/>
+                </a:solidFill>
+              </a:rPr>
+              <a:t>(c) titi_23 - mediateur-numerique.github.io - Reproduction interdite sans autorisation</a:t>
+            </a:r>
+          </a:p>
+        </p:txBody>
+      </p:sp>
     </p:spTree>
   </p:cSld>
   <p:clrMapOvr>
@@ -8432,6 +8712,46 @@
           </a:p>
         </p:txBody>
       </p:sp>
+      <p:sp>
+        <p:nvSpPr>
+          <p:cNvPr id="28" name="ZoneTexte 27">
+            <a:extLst>
+              <a:ext uri="{FF2B5EF4-FFF2-40B4-BE49-F238E27FC236}">
+                <a16:creationId xmlns:a16="http://schemas.microsoft.com/office/drawing/2014/main" id="{BED8177C-1D78-1759-4439-4DF6CE48816F}"/>
+              </a:ext>
+            </a:extLst>
+          </p:cNvPr>
+          <p:cNvSpPr txBox="1"/>
+          <p:nvPr/>
+        </p:nvSpPr>
+        <p:spPr>
+          <a:xfrm>
+            <a:off x="0" y="4864100"/>
+            <a:ext cx="9144000" cy="230832"/>
+          </a:xfrm>
+          <a:prstGeom prst="rect">
+            <a:avLst/>
+          </a:prstGeom>
+          <a:noFill/>
+        </p:spPr>
+        <p:txBody>
+          <a:bodyPr vert="horz" rtlCol="0">
+            <a:spAutoFit/>
+          </a:bodyPr>
+          <a:lstStyle/>
+          <a:p>
+            <a:pPr algn="ctr"/>
+            <a:r>
+              <a:rPr lang="fr-FR" sz="900">
+                <a:solidFill>
+                  <a:srgbClr val="B4B4B4"/>
+                </a:solidFill>
+              </a:rPr>
+              <a:t>(c) titi_23 - mediateur-numerique.github.io - Reproduction interdite sans autorisation</a:t>
+            </a:r>
+          </a:p>
+        </p:txBody>
+      </p:sp>
     </p:spTree>
   </p:cSld>
   <p:clrMapOvr>
@@ -9102,6 +9422,46 @@
                 </a:solidFill>
               </a:rPr>
               <a:t>Yggdrasil · Cédric WALTENER · Médiateur Numérique · 2026</a:t>
+            </a:r>
+          </a:p>
+        </p:txBody>
+      </p:sp>
+      <p:sp>
+        <p:nvSpPr>
+          <p:cNvPr id="19" name="ZoneTexte 18">
+            <a:extLst>
+              <a:ext uri="{FF2B5EF4-FFF2-40B4-BE49-F238E27FC236}">
+                <a16:creationId xmlns:a16="http://schemas.microsoft.com/office/drawing/2014/main" id="{EAD65FC2-B341-E814-4080-D0FA14479323}"/>
+              </a:ext>
+            </a:extLst>
+          </p:cNvPr>
+          <p:cNvSpPr txBox="1"/>
+          <p:nvPr/>
+        </p:nvSpPr>
+        <p:spPr>
+          <a:xfrm>
+            <a:off x="0" y="4864100"/>
+            <a:ext cx="9144000" cy="230832"/>
+          </a:xfrm>
+          <a:prstGeom prst="rect">
+            <a:avLst/>
+          </a:prstGeom>
+          <a:noFill/>
+        </p:spPr>
+        <p:txBody>
+          <a:bodyPr vert="horz" rtlCol="0">
+            <a:spAutoFit/>
+          </a:bodyPr>
+          <a:lstStyle/>
+          <a:p>
+            <a:pPr algn="ctr"/>
+            <a:r>
+              <a:rPr lang="fr-FR" sz="900">
+                <a:solidFill>
+                  <a:srgbClr val="B4B4B4"/>
+                </a:solidFill>
+              </a:rPr>
+              <a:t>(c) titi_23 - mediateur-numerique.github.io - Reproduction interdite sans autorisation</a:t>
             </a:r>
           </a:p>
         </p:txBody>
